--- a/Introduccion a la Ingenieria/Clases/Clase 8 - Taller de aplicacion del ciclo de vida/Presentacion.pptx
+++ b/Introduccion a la Ingenieria/Clases/Clase 8 - Taller de aplicacion del ciclo de vida/Presentacion.pptx
@@ -4720,7 +4720,7 @@
               </a:spcAft>
             </a:pPr>
             <a:r>
-              <a:rPr sz="1600" b="0" i="0">
+              <a:rPr sz="2000" b="0" i="0">
                 <a:solidFill>
                   <a:srgbClr val="333333"/>
                 </a:solidFill>
@@ -4729,7 +4729,7 @@
               <a:t>–   </a:t>
             </a:r>
             <a:r>
-              <a:rPr sz="1600" b="1" i="0">
+              <a:rPr sz="2000" b="1" i="0">
                 <a:solidFill>
                   <a:srgbClr val="333333"/>
                 </a:solidFill>
@@ -4738,7 +4738,7 @@
               <a:t>Trabajo dirigido:</a:t>
             </a:r>
             <a:r>
-              <a:rPr sz="1600" b="0" i="0">
+              <a:rPr sz="2000" b="0" i="0">
                 <a:solidFill>
                   <a:srgbClr val="333333"/>
                 </a:solidFill>
@@ -4747,7 +4747,7 @@
               <a:t> Discusión de ejemplos reales — buscar </a:t>
             </a:r>
             <a:r>
-              <a:rPr sz="1600" b="1" i="0">
+              <a:rPr sz="2000" b="1" i="0">
                 <a:solidFill>
                   <a:srgbClr val="333333"/>
                 </a:solidFill>
@@ -4756,7 +4756,7 @@
               <a:t>un caso propio</a:t>
             </a:r>
             <a:r>
-              <a:rPr sz="1600" b="0" i="0">
+              <a:rPr sz="2000" b="0" i="0">
                 <a:solidFill>
                   <a:srgbClr val="333333"/>
                 </a:solidFill>
@@ -4772,7 +4772,7 @@
               </a:spcAft>
             </a:pPr>
             <a:r>
-              <a:rPr sz="1600" b="0" i="0">
+              <a:rPr sz="2000" b="0" i="0">
                 <a:solidFill>
                   <a:srgbClr val="333333"/>
                 </a:solidFill>
@@ -4781,7 +4781,7 @@
               <a:t>–   </a:t>
             </a:r>
             <a:r>
-              <a:rPr sz="1600" b="1" i="0">
+              <a:rPr sz="2000" b="1" i="0">
                 <a:solidFill>
                   <a:srgbClr val="333333"/>
                 </a:solidFill>
@@ -4790,7 +4790,7 @@
               <a:t>Trabajo independiente:</a:t>
             </a:r>
             <a:r>
-              <a:rPr sz="1600" b="0" i="0">
+              <a:rPr sz="2000" b="0" i="0">
                 <a:solidFill>
                   <a:srgbClr val="333333"/>
                 </a:solidFill>
@@ -4806,7 +4806,7 @@
               </a:spcAft>
             </a:pPr>
             <a:r>
-              <a:rPr sz="1600" b="0" i="0">
+              <a:rPr sz="2000" b="0" i="0">
                 <a:solidFill>
                   <a:srgbClr val="333333"/>
                 </a:solidFill>
@@ -4815,7 +4815,7 @@
               <a:t>–   </a:t>
             </a:r>
             <a:r>
-              <a:rPr sz="1600" b="1" i="0">
+              <a:rPr sz="2000" b="1" i="0">
                 <a:solidFill>
                   <a:srgbClr val="333333"/>
                 </a:solidFill>
@@ -4824,7 +4824,7 @@
               <a:t>Sesión 9 · Estrategias de innovación en Ingeniería</a:t>
             </a:r>
             <a:r>
-              <a:rPr sz="1600" b="0" i="0">
+              <a:rPr sz="2000" b="0" i="0">
                 <a:solidFill>
                   <a:srgbClr val="333333"/>
                 </a:solidFill>
@@ -4833,7 +4833,7 @@
               <a:t> — los </a:t>
             </a:r>
             <a:r>
-              <a:rPr sz="1600" b="1" i="0">
+              <a:rPr sz="2000" b="1" i="0">
                 <a:solidFill>
                   <a:srgbClr val="333333"/>
                 </a:solidFill>
@@ -4842,7 +4842,7 @@
               <a:t>antecedentes</a:t>
             </a:r>
             <a:r>
-              <a:rPr sz="1600" b="0" i="0">
+              <a:rPr sz="2000" b="0" i="0">
                 <a:solidFill>
                   <a:srgbClr val="333333"/>
                 </a:solidFill>
@@ -4858,7 +4858,7 @@
               </a:spcAft>
             </a:pPr>
             <a:r>
-              <a:rPr sz="1600" b="0" i="0">
+              <a:rPr sz="2000" b="0" i="0">
                 <a:solidFill>
                   <a:srgbClr val="333333"/>
                 </a:solidFill>
@@ -4867,7 +4867,7 @@
               <a:t>–   </a:t>
             </a:r>
             <a:r>
-              <a:rPr sz="1600" b="1" i="0">
+              <a:rPr sz="2000" b="1" i="0">
                 <a:solidFill>
                   <a:srgbClr val="333333"/>
                 </a:solidFill>
@@ -4876,7 +4876,7 @@
               <a:t>Aviso:</a:t>
             </a:r>
             <a:r>
-              <a:rPr sz="1600" b="0" i="0">
+              <a:rPr sz="2000" b="0" i="0">
                 <a:solidFill>
                   <a:srgbClr val="333333"/>
                 </a:solidFill>
@@ -4892,7 +4892,7 @@
               </a:spcAft>
             </a:pPr>
             <a:r>
-              <a:rPr sz="1600" b="0" i="0">
+              <a:rPr sz="2000" b="0" i="0">
                 <a:solidFill>
                   <a:srgbClr val="333333"/>
                 </a:solidFill>
@@ -4901,7 +4901,7 @@
               <a:t>–   </a:t>
             </a:r>
             <a:r>
-              <a:rPr sz="1600" b="1" i="0">
+              <a:rPr sz="2000" b="1" i="0">
                 <a:solidFill>
                   <a:srgbClr val="333333"/>
                 </a:solidFill>
@@ -4910,7 +4910,7 @@
               <a:t>Antes de salir:</a:t>
             </a:r>
             <a:r>
-              <a:rPr sz="1600" b="0" i="0">
+              <a:rPr sz="2000" b="0" i="0">
                 <a:solidFill>
                   <a:srgbClr val="333333"/>
                 </a:solidFill>
@@ -5484,7 +5484,7 @@
         <p:spPr>
           <a:xfrm>
             <a:off x="502920" y="2798064"/>
-            <a:ext cx="2164019" cy="2560320"/>
+            <a:ext cx="2164019" cy="3099816"/>
           </a:xfrm>
           <a:prstGeom prst="rect">
             <a:avLst/>
@@ -5599,7 +5599,7 @@
         <p:spPr>
           <a:xfrm>
             <a:off x="2758379" y="2798064"/>
-            <a:ext cx="2164019" cy="2560320"/>
+            <a:ext cx="2164019" cy="3099816"/>
           </a:xfrm>
           <a:prstGeom prst="rect">
             <a:avLst/>
@@ -5714,7 +5714,7 @@
         <p:spPr>
           <a:xfrm>
             <a:off x="5013838" y="2798064"/>
-            <a:ext cx="2164019" cy="2560320"/>
+            <a:ext cx="2164019" cy="3099816"/>
           </a:xfrm>
           <a:prstGeom prst="rect">
             <a:avLst/>
@@ -5829,7 +5829,7 @@
         <p:spPr>
           <a:xfrm>
             <a:off x="7269297" y="2798064"/>
-            <a:ext cx="2164019" cy="2560320"/>
+            <a:ext cx="2164019" cy="3099816"/>
           </a:xfrm>
           <a:prstGeom prst="rect">
             <a:avLst/>
@@ -5944,7 +5944,7 @@
         <p:spPr>
           <a:xfrm>
             <a:off x="9524756" y="2798064"/>
-            <a:ext cx="2164019" cy="2560320"/>
+            <a:ext cx="2164019" cy="3099816"/>
           </a:xfrm>
           <a:prstGeom prst="rect">
             <a:avLst/>
@@ -5978,8 +5978,8 @@
         </p:nvSpPr>
         <p:spPr>
           <a:xfrm>
-            <a:off x="457200" y="5943600"/>
-            <a:ext cx="11277295" cy="365760"/>
+            <a:off x="457200" y="5806440"/>
+            <a:ext cx="11277295" cy="640080"/>
           </a:xfrm>
           <a:prstGeom prst="rect">
             <a:avLst/>
@@ -6241,7 +6241,7 @@
               </a:spcAft>
             </a:pPr>
             <a:r>
-              <a:rPr sz="1600" b="0" i="0">
+              <a:rPr sz="2000" b="0" i="0">
                 <a:solidFill>
                   <a:srgbClr val="333333"/>
                 </a:solidFill>
@@ -6250,7 +6250,7 @@
               <a:t>–   Identificar, en un caso real, </a:t>
             </a:r>
             <a:r>
-              <a:rPr sz="1600" b="1" i="0">
+              <a:rPr sz="2000" b="1" i="0">
                 <a:solidFill>
                   <a:srgbClr val="333333"/>
                 </a:solidFill>
@@ -6259,7 +6259,7 @@
               <a:t>qué fase se saltó</a:t>
             </a:r>
             <a:r>
-              <a:rPr sz="1600" b="0" i="0">
+              <a:rPr sz="2000" b="0" i="0">
                 <a:solidFill>
                   <a:srgbClr val="333333"/>
                 </a:solidFill>
@@ -6275,7 +6275,7 @@
               </a:spcAft>
             </a:pPr>
             <a:r>
-              <a:rPr sz="1600" b="0" i="0">
+              <a:rPr sz="2000" b="0" i="0">
                 <a:solidFill>
                   <a:srgbClr val="333333"/>
                 </a:solidFill>
@@ -6284,7 +6284,7 @@
               <a:t>–   Comparar dos alternativas de solución con una </a:t>
             </a:r>
             <a:r>
-              <a:rPr sz="1600" b="1" i="0">
+              <a:rPr sz="2000" b="1" i="0">
                 <a:solidFill>
                   <a:srgbClr val="333333"/>
                 </a:solidFill>
@@ -6293,7 +6293,7 @@
               <a:t>matriz de criterios</a:t>
             </a:r>
             <a:r>
-              <a:rPr sz="1600" b="0" i="0">
+              <a:rPr sz="2000" b="0" i="0">
                 <a:solidFill>
                   <a:srgbClr val="333333"/>
                 </a:solidFill>
@@ -6309,7 +6309,7 @@
               </a:spcAft>
             </a:pPr>
             <a:r>
-              <a:rPr sz="1600" b="0" i="0">
+              <a:rPr sz="2000" b="0" i="0">
                 <a:solidFill>
                   <a:srgbClr val="333333"/>
                 </a:solidFill>
@@ -6318,7 +6318,7 @@
               <a:t>–   Definir el </a:t>
             </a:r>
             <a:r>
-              <a:rPr sz="1600" b="1" i="0">
+              <a:rPr sz="2000" b="1" i="0">
                 <a:solidFill>
                   <a:srgbClr val="333333"/>
                 </a:solidFill>
@@ -6327,7 +6327,7 @@
               <a:t>alcance mínimo</a:t>
             </a:r>
             <a:r>
-              <a:rPr sz="1600" b="0" i="0">
+              <a:rPr sz="2000" b="0" i="0">
                 <a:solidFill>
                   <a:srgbClr val="333333"/>
                 </a:solidFill>
@@ -6343,7 +6343,7 @@
               </a:spcAft>
             </a:pPr>
             <a:r>
-              <a:rPr sz="1600" b="0" i="0">
+              <a:rPr sz="2000" b="0" i="0">
                 <a:solidFill>
                   <a:srgbClr val="333333"/>
                 </a:solidFill>
@@ -6352,7 +6352,7 @@
               <a:t>–   Escribir el </a:t>
             </a:r>
             <a:r>
-              <a:rPr sz="1600" b="1" i="0">
+              <a:rPr sz="2000" b="1" i="0">
                 <a:solidFill>
                   <a:srgbClr val="333333"/>
                 </a:solidFill>
@@ -6361,7 +6361,7 @@
               <a:t>plan de validación</a:t>
             </a:r>
             <a:r>
-              <a:rPr sz="1600" b="0" i="0">
+              <a:rPr sz="2000" b="0" i="0">
                 <a:solidFill>
                   <a:srgbClr val="333333"/>
                 </a:solidFill>

--- a/Introduccion a la Ingenieria/Clases/Clase 8 - Taller de aplicacion del ciclo de vida/Presentacion.pptx
+++ b/Introduccion a la Ingenieria/Clases/Clase 8 - Taller de aplicacion del ciclo de vida/Presentacion.pptx
@@ -4687,7 +4687,7 @@
                 </a:solidFill>
                 <a:latin typeface="Calibri"/>
               </a:rPr>
-              <a:t>Para la sesión 9</a:t>
+              <a:t>Para la Clase 9</a:t>
             </a:r>
           </a:p>
         </p:txBody>
@@ -4821,7 +4821,7 @@
                 </a:solidFill>
                 <a:latin typeface="Calibri"/>
               </a:rPr>
-              <a:t>Sesión 9 · Estrategias de innovación en Ingeniería</a:t>
+              <a:t>Clase 9 · Estrategias de innovación en Ingeniería</a:t>
             </a:r>
             <a:r>
               <a:rPr sz="2000" b="0" i="0">
@@ -8918,7 +8918,7 @@
                 </a:solidFill>
                 <a:latin typeface="Calibri"/>
               </a:rPr>
-              <a:t>No es «la primera parte de todo lo que soñamos». Un alcance mínimo que no resuelve nada por sí solo no se puede probar, y entonces no sirve para aprender nada en la sesión 12.</a:t>
+              <a:t>No es «la primera parte de todo lo que soñamos». Un alcance mínimo que no resuelve nada por sí solo no se puede probar, y entonces no sirve para aprender nada en la Clase 12.</a:t>
             </a:r>
           </a:p>
         </p:txBody>
